--- a/nba_bank_marketing.pptx
+++ b/nba_bank_marketing.pptx
@@ -10,7 +10,6 @@
   <p:sldIdLst>
     <p:sldId id="256" r:id="rId6"/>
     <p:sldId id="257" r:id="rId7"/>
-    <p:sldId id="258" r:id="rId8"/>
   </p:sldIdLst>
   <p:sldSz cy="5143500" cx="9144000"/>
   <p:notesSz cx="6858000" cy="9144000"/>
@@ -842,105 +841,6 @@
       <p:sp>
         <p:nvSpPr>
           <p:cNvPr id="58" name="Google Shape;58;h308451d285712164_0_18:notes"/>
-          <p:cNvSpPr txBox="1"/>
-          <p:nvPr>
-            <p:ph idx="1" type="body"/>
-          </p:nvPr>
-        </p:nvSpPr>
-        <p:spPr>
-          <a:xfrm>
-            <a:off x="685800" y="4343400"/>
-            <a:ext cx="5486400" cy="4114800"/>
-          </a:xfrm>
-          <a:prstGeom prst="rect">
-            <a:avLst/>
-          </a:prstGeom>
-        </p:spPr>
-        <p:txBody>
-          <a:bodyPr anchorCtr="0" anchor="t" bIns="91425" lIns="91425" spcFirstLastPara="1" rIns="91425" wrap="square" tIns="91425">
-            <a:noAutofit/>
-          </a:bodyPr>
-          <a:lstStyle/>
-          <a:p>
-            <a:pPr indent="0" lvl="0" marL="0" rtl="0" algn="l">
-              <a:spcBef>
-                <a:spcPts val="0"/>
-              </a:spcBef>
-              <a:spcAft>
-                <a:spcPts val="0"/>
-              </a:spcAft>
-              <a:buNone/>
-            </a:pPr>
-            <a:r>
-              <a:t/>
-            </a:r>
-            <a:endParaRPr/>
-          </a:p>
-        </p:txBody>
-      </p:sp>
-    </p:spTree>
-  </p:cSld>
-  <p:clrMapOvr>
-    <a:masterClrMapping/>
-  </p:clrMapOvr>
-</p:notes>
-</file>
-
-<file path=ppt/notesSlides/notesSlide3.xml><?xml version="1.0" encoding="utf-8"?>
-<p:notes xmlns:a="http://schemas.openxmlformats.org/drawingml/2006/main" xmlns:r="http://schemas.openxmlformats.org/officeDocument/2006/relationships" xmlns:mc="http://schemas.openxmlformats.org/markup-compatibility/2006" xmlns:mv="urn:schemas-microsoft-com:mac:vml" xmlns:p="http://schemas.openxmlformats.org/presentationml/2006/main" xmlns:c="http://schemas.openxmlformats.org/drawingml/2006/chart" xmlns:dgm="http://schemas.openxmlformats.org/drawingml/2006/diagram" xmlns:o="urn:schemas-microsoft-com:office:office" xmlns:v="urn:schemas-microsoft-com:vml" xmlns:pvml="urn:schemas-microsoft-com:office:powerpoint" xmlns:com="http://schemas.openxmlformats.org/drawingml/2006/compatibility" xmlns:p14="http://schemas.microsoft.com/office/powerpoint/2010/main" xmlns:p15="http://schemas.microsoft.com/office/powerpoint/2012/main" xmlns:ahyp="http://schemas.microsoft.com/office/drawing/2018/hyperlinkcolor" showMasterPhAnim="0" showMasterSp="0">
-  <p:cSld>
-    <p:spTree>
-      <p:nvGrpSpPr>
-        <p:cNvPr id="63" name="Shape 63"/>
-        <p:cNvGrpSpPr/>
-        <p:nvPr/>
-      </p:nvGrpSpPr>
-      <p:grpSpPr>
-        <a:xfrm>
-          <a:off x="0" y="0"/>
-          <a:ext cx="0" cy="0"/>
-          <a:chOff x="0" y="0"/>
-          <a:chExt cx="0" cy="0"/>
-        </a:xfrm>
-      </p:grpSpPr>
-      <p:sp>
-        <p:nvSpPr>
-          <p:cNvPr id="64" name="Google Shape;64;h308451d285712164_0_7:notes"/>
-          <p:cNvSpPr/>
-          <p:nvPr>
-            <p:ph idx="2" type="sldImg"/>
-          </p:nvPr>
-        </p:nvSpPr>
-        <p:spPr>
-          <a:xfrm>
-            <a:off x="381300" y="685800"/>
-            <a:ext cx="6096000" cy="3429000"/>
-          </a:xfrm>
-          <a:custGeom>
-            <a:rect b="b" l="l" r="r" t="t"/>
-            <a:pathLst>
-              <a:path extrusionOk="0" h="120000" w="120000">
-                <a:moveTo>
-                  <a:pt x="0" y="0"/>
-                </a:moveTo>
-                <a:lnTo>
-                  <a:pt x="120000" y="0"/>
-                </a:lnTo>
-                <a:lnTo>
-                  <a:pt x="120000" y="120000"/>
-                </a:lnTo>
-                <a:lnTo>
-                  <a:pt x="0" y="120000"/>
-                </a:lnTo>
-                <a:close/>
-              </a:path>
-            </a:pathLst>
-          </a:custGeom>
-        </p:spPr>
-      </p:sp>
-      <p:sp>
-        <p:nvSpPr>
-          <p:cNvPr id="65" name="Google Shape;65;h308451d285712164_0_7:notes"/>
           <p:cNvSpPr txBox="1"/>
           <p:nvPr>
             <p:ph idx="1" type="body"/>
@@ -5854,7 +5754,7 @@
             </a:pPr>
             <a:r>
               <a:rPr lang="hu"/>
-              <a:t>Design and Challenges</a:t>
+              <a:t>Design, Challenges and Results</a:t>
             </a:r>
             <a:endParaRPr/>
           </a:p>
@@ -5871,7 +5771,7 @@
         <p:spPr>
           <a:xfrm>
             <a:off x="311700" y="1152475"/>
-            <a:ext cx="3934800" cy="3416400"/>
+            <a:ext cx="2448000" cy="2897400"/>
           </a:xfrm>
           <a:prstGeom prst="rect">
             <a:avLst/>
@@ -5879,7 +5779,7 @@
         </p:spPr>
         <p:txBody>
           <a:bodyPr anchorCtr="0" anchor="t" bIns="91425" lIns="91425" spcFirstLastPara="1" rIns="91425" wrap="square" tIns="91425">
-            <a:normAutofit/>
+            <a:normAutofit fontScale="92500" lnSpcReduction="20000"/>
           </a:bodyPr>
           <a:lstStyle/>
           <a:p>
@@ -6024,8 +5924,8 @@
         </p:nvSpPr>
         <p:spPr>
           <a:xfrm>
-            <a:off x="4572000" y="1111700"/>
-            <a:ext cx="3934800" cy="3416400"/>
+            <a:off x="2880275" y="1152475"/>
+            <a:ext cx="2536500" cy="3092100"/>
           </a:xfrm>
           <a:prstGeom prst="rect">
             <a:avLst/>
@@ -6033,7 +5933,7 @@
         </p:spPr>
         <p:txBody>
           <a:bodyPr anchorCtr="0" anchor="t" bIns="91425" lIns="91425" spcFirstLastPara="1" rIns="91425" wrap="square" tIns="91425">
-            <a:normAutofit/>
+            <a:normAutofit fontScale="85000" lnSpcReduction="10000"/>
           </a:bodyPr>
           <a:lstStyle/>
           <a:p>
@@ -6167,74 +6067,9 @@
           </a:p>
         </p:txBody>
       </p:sp>
-    </p:spTree>
-  </p:cSld>
-  <p:clrMapOvr>
-    <a:masterClrMapping/>
-  </p:clrMapOvr>
-</p:sld>
-</file>
-
-<file path=ppt/slides/slide3.xml><?xml version="1.0" encoding="utf-8"?>
-<p:sld xmlns:a="http://schemas.openxmlformats.org/drawingml/2006/main" xmlns:r="http://schemas.openxmlformats.org/officeDocument/2006/relationships" xmlns:mc="http://schemas.openxmlformats.org/markup-compatibility/2006" xmlns:mv="urn:schemas-microsoft-com:mac:vml" xmlns:p="http://schemas.openxmlformats.org/presentationml/2006/main" xmlns:c="http://schemas.openxmlformats.org/drawingml/2006/chart" xmlns:dgm="http://schemas.openxmlformats.org/drawingml/2006/diagram" xmlns:o="urn:schemas-microsoft-com:office:office" xmlns:v="urn:schemas-microsoft-com:vml" xmlns:pvml="urn:schemas-microsoft-com:office:powerpoint" xmlns:com="http://schemas.openxmlformats.org/drawingml/2006/compatibility" xmlns:p14="http://schemas.microsoft.com/office/powerpoint/2010/main" xmlns:p15="http://schemas.microsoft.com/office/powerpoint/2012/main" xmlns:ahyp="http://schemas.microsoft.com/office/drawing/2018/hyperlinkcolor">
-  <p:cSld>
-    <p:spTree>
-      <p:nvGrpSpPr>
-        <p:cNvPr id="66" name="Shape 66"/>
-        <p:cNvGrpSpPr/>
-        <p:nvPr/>
-      </p:nvGrpSpPr>
-      <p:grpSpPr>
-        <a:xfrm>
-          <a:off x="0" y="0"/>
-          <a:ext cx="0" cy="0"/>
-          <a:chOff x="0" y="0"/>
-          <a:chExt cx="0" cy="0"/>
-        </a:xfrm>
-      </p:grpSpPr>
       <p:sp>
         <p:nvSpPr>
-          <p:cNvPr id="67" name="Google Shape;67;p15"/>
-          <p:cNvSpPr txBox="1"/>
-          <p:nvPr>
-            <p:ph type="title"/>
-          </p:nvPr>
-        </p:nvSpPr>
-        <p:spPr>
-          <a:xfrm>
-            <a:off x="311700" y="445025"/>
-            <a:ext cx="8520600" cy="572700"/>
-          </a:xfrm>
-          <a:prstGeom prst="rect">
-            <a:avLst/>
-          </a:prstGeom>
-        </p:spPr>
-        <p:txBody>
-          <a:bodyPr anchorCtr="0" anchor="t" bIns="91425" lIns="91425" spcFirstLastPara="1" rIns="91425" wrap="square" tIns="91425">
-            <a:normAutofit fontScale="90000"/>
-          </a:bodyPr>
-          <a:lstStyle/>
-          <a:p>
-            <a:pPr indent="0" lvl="0" marL="0" rtl="0" algn="l">
-              <a:spcBef>
-                <a:spcPts val="0"/>
-              </a:spcBef>
-              <a:spcAft>
-                <a:spcPts val="0"/>
-              </a:spcAft>
-              <a:buNone/>
-            </a:pPr>
-            <a:r>
-              <a:rPr lang="hu"/>
-              <a:t>Results</a:t>
-            </a:r>
-            <a:endParaRPr/>
-          </a:p>
-        </p:txBody>
-      </p:sp>
-      <p:sp>
-        <p:nvSpPr>
-          <p:cNvPr id="68" name="Google Shape;68;p15"/>
+          <p:cNvPr id="63" name="Google Shape;63;p14"/>
           <p:cNvSpPr txBox="1"/>
           <p:nvPr>
             <p:ph idx="1" type="body"/>
@@ -6242,15 +6077,15 @@
         </p:nvSpPr>
         <p:spPr>
           <a:xfrm>
-            <a:off x="311700" y="1152475"/>
-            <a:ext cx="8520600" cy="3416400"/>
+            <a:off x="6135825" y="1195200"/>
+            <a:ext cx="2371200" cy="2102700"/>
           </a:xfrm>
           <a:prstGeom prst="rect">
             <a:avLst/>
           </a:prstGeom>
         </p:spPr>
         <p:txBody>
-          <a:bodyPr anchorCtr="0" anchor="t" bIns="91425" lIns="91425" spcFirstLastPara="1" rIns="91425" wrap="square" tIns="91425">
+          <a:bodyPr anchorCtr="0" anchor="t" bIns="56275" lIns="56275" spcFirstLastPara="1" rIns="56275" wrap="square" tIns="56275">
             <a:normAutofit fontScale="85000" lnSpcReduction="20000"/>
           </a:bodyPr>
           <a:lstStyle/>
@@ -6262,18 +6097,13 @@
               <a:spcAft>
                 <a:spcPts val="0"/>
               </a:spcAft>
-              <a:buClr>
-                <a:schemeClr val="dk1"/>
-              </a:buClr>
-              <a:buSzPct val="61111"/>
-              <a:buFont typeface="Arial"/>
               <a:buNone/>
             </a:pPr>
             <a:r>
-              <a:rPr b="1" lang="hu"/>
+              <a:rPr b="1" lang="hu" sz="1108"/>
               <a:t>OOF threshold selection:</a:t>
             </a:r>
-            <a:endParaRPr b="1"/>
+            <a:endParaRPr b="1" sz="1108"/>
           </a:p>
           <a:p>
             <a:pPr indent="0" lvl="0" marL="0" rtl="0" algn="l">
@@ -6283,18 +6113,13 @@
               <a:spcAft>
                 <a:spcPts val="0"/>
               </a:spcAft>
-              <a:buClr>
-                <a:schemeClr val="dk1"/>
-              </a:buClr>
-              <a:buSzPct val="61111"/>
-              <a:buFont typeface="Arial"/>
               <a:buNone/>
             </a:pPr>
             <a:r>
-              <a:rPr lang="hu"/>
+              <a:rPr lang="hu" sz="1108"/>
               <a:t>Selected model: random_forest</a:t>
             </a:r>
-            <a:endParaRPr/>
+            <a:endParaRPr sz="1108"/>
           </a:p>
           <a:p>
             <a:pPr indent="0" lvl="0" marL="0" rtl="0" algn="l">
@@ -6304,18 +6129,13 @@
               <a:spcAft>
                 <a:spcPts val="0"/>
               </a:spcAft>
-              <a:buClr>
-                <a:schemeClr val="dk1"/>
-              </a:buClr>
-              <a:buSzPct val="61111"/>
-              <a:buFont typeface="Arial"/>
               <a:buNone/>
             </a:pPr>
             <a:r>
-              <a:rPr lang="hu"/>
-              <a:t>Threshold: 0.18145248856467774</a:t>
+              <a:rPr lang="hu" sz="1108"/>
+              <a:t>Threshold: 0.1815</a:t>
             </a:r>
-            <a:endParaRPr/>
+            <a:endParaRPr sz="1108"/>
           </a:p>
           <a:p>
             <a:pPr indent="0" lvl="0" marL="0" rtl="0" algn="l">
@@ -6325,18 +6145,13 @@
               <a:spcAft>
                 <a:spcPts val="0"/>
               </a:spcAft>
-              <a:buClr>
-                <a:schemeClr val="dk1"/>
-              </a:buClr>
-              <a:buSzPct val="61111"/>
-              <a:buFont typeface="Arial"/>
               <a:buNone/>
             </a:pPr>
             <a:r>
-              <a:rPr lang="hu"/>
-              <a:t>Precision: 0.40385056154022464</a:t>
+              <a:rPr lang="hu" sz="1108"/>
+              <a:t>Precision: 0.4039</a:t>
             </a:r>
-            <a:endParaRPr/>
+            <a:endParaRPr sz="1108"/>
           </a:p>
           <a:p>
             <a:pPr indent="0" lvl="0" marL="0" rtl="0" algn="l">
@@ -6346,18 +6161,13 @@
               <a:spcAft>
                 <a:spcPts val="0"/>
               </a:spcAft>
-              <a:buClr>
-                <a:schemeClr val="dk1"/>
-              </a:buClr>
-              <a:buSzPct val="61111"/>
-              <a:buFont typeface="Arial"/>
               <a:buNone/>
             </a:pPr>
             <a:r>
-              <a:rPr lang="hu"/>
-              <a:t>Recall: 0.4164500118175372</a:t>
+              <a:rPr lang="hu" sz="1108"/>
+              <a:t>Recall: 0.4164</a:t>
             </a:r>
-            <a:endParaRPr/>
+            <a:endParaRPr sz="1108"/>
           </a:p>
           <a:p>
             <a:pPr indent="0" lvl="0" marL="0" rtl="0" algn="l">
@@ -6370,10 +6180,10 @@
               <a:buNone/>
             </a:pPr>
             <a:r>
-              <a:rPr lang="hu"/>
-              <a:t>F1: 0.41005352571561554</a:t>
+              <a:rPr lang="hu" sz="1108"/>
+              <a:t>F1: 0.41</a:t>
             </a:r>
-            <a:endParaRPr/>
+            <a:endParaRPr sz="1108"/>
           </a:p>
           <a:p>
             <a:pPr indent="0" lvl="0" marL="0" rtl="0" algn="l">
@@ -6383,17 +6193,12 @@
               <a:spcAft>
                 <a:spcPts val="0"/>
               </a:spcAft>
-              <a:buClr>
-                <a:schemeClr val="dk1"/>
-              </a:buClr>
-              <a:buSzPct val="61111"/>
-              <a:buFont typeface="Arial"/>
               <a:buNone/>
             </a:pPr>
             <a:r>
               <a:t/>
             </a:r>
-            <a:endParaRPr/>
+            <a:endParaRPr sz="1108"/>
           </a:p>
           <a:p>
             <a:pPr indent="0" lvl="0" marL="0" rtl="0" algn="l">
@@ -6403,18 +6208,13 @@
               <a:spcAft>
                 <a:spcPts val="0"/>
               </a:spcAft>
-              <a:buClr>
-                <a:schemeClr val="dk1"/>
-              </a:buClr>
-              <a:buSzPct val="61111"/>
-              <a:buFont typeface="Arial"/>
               <a:buNone/>
             </a:pPr>
             <a:r>
-              <a:rPr b="1" lang="hu"/>
+              <a:rPr b="1" lang="hu" sz="1108"/>
               <a:t>Final test set evaluation:</a:t>
             </a:r>
-            <a:endParaRPr b="1"/>
+            <a:endParaRPr b="1" sz="1108"/>
           </a:p>
           <a:p>
             <a:pPr indent="0" lvl="0" marL="0" rtl="0" algn="l">
@@ -6424,18 +6224,13 @@
               <a:spcAft>
                 <a:spcPts val="0"/>
               </a:spcAft>
-              <a:buClr>
-                <a:schemeClr val="dk1"/>
-              </a:buClr>
-              <a:buSzPct val="61111"/>
-              <a:buFont typeface="Arial"/>
               <a:buNone/>
             </a:pPr>
             <a:r>
-              <a:rPr lang="hu"/>
-              <a:t>Threshold: 0.18145248856467774</a:t>
+              <a:rPr lang="hu" sz="1108"/>
+              <a:t>Threshold: 0.1815</a:t>
             </a:r>
-            <a:endParaRPr/>
+            <a:endParaRPr sz="1108"/>
           </a:p>
           <a:p>
             <a:pPr indent="0" lvl="0" marL="0" rtl="0" algn="l">
@@ -6445,18 +6240,13 @@
               <a:spcAft>
                 <a:spcPts val="0"/>
               </a:spcAft>
-              <a:buClr>
-                <a:schemeClr val="dk1"/>
-              </a:buClr>
-              <a:buSzPct val="61111"/>
-              <a:buFont typeface="Arial"/>
               <a:buNone/>
             </a:pPr>
             <a:r>
-              <a:rPr lang="hu"/>
-              <a:t>Average Precision: 0.3905019158575219</a:t>
+              <a:rPr lang="hu" sz="1108"/>
+              <a:t>Average Precision: 0.3905</a:t>
             </a:r>
-            <a:endParaRPr/>
+            <a:endParaRPr sz="1108"/>
           </a:p>
           <a:p>
             <a:pPr indent="0" lvl="0" marL="0" rtl="0" algn="l">
@@ -6466,18 +6256,13 @@
               <a:spcAft>
                 <a:spcPts val="0"/>
               </a:spcAft>
-              <a:buClr>
-                <a:schemeClr val="dk1"/>
-              </a:buClr>
-              <a:buSzPct val="61111"/>
-              <a:buFont typeface="Arial"/>
               <a:buNone/>
             </a:pPr>
             <a:r>
-              <a:rPr lang="hu"/>
-              <a:t>Precision: 0.40951492537313433</a:t>
+              <a:rPr lang="hu" sz="1108"/>
+              <a:t>Precision: 0.4095</a:t>
             </a:r>
-            <a:endParaRPr/>
+            <a:endParaRPr sz="1108"/>
           </a:p>
           <a:p>
             <a:pPr indent="0" lvl="0" marL="0" rtl="0" algn="l">
@@ -6487,18 +6272,13 @@
               <a:spcAft>
                 <a:spcPts val="0"/>
               </a:spcAft>
-              <a:buClr>
-                <a:schemeClr val="dk1"/>
-              </a:buClr>
-              <a:buSzPct val="61111"/>
-              <a:buFont typeface="Arial"/>
               <a:buNone/>
             </a:pPr>
             <a:r>
-              <a:rPr lang="hu"/>
-              <a:t>Recall: 0.41493383742911155</a:t>
+              <a:rPr lang="hu" sz="1108"/>
+              <a:t>Recall: 0.4149</a:t>
             </a:r>
-            <a:endParaRPr/>
+            <a:endParaRPr sz="1108"/>
           </a:p>
           <a:p>
             <a:pPr indent="0" lvl="0" marL="0" rtl="0" algn="l">
@@ -6508,18 +6288,13 @@
               <a:spcAft>
                 <a:spcPts val="0"/>
               </a:spcAft>
-              <a:buClr>
-                <a:schemeClr val="dk1"/>
-              </a:buClr>
-              <a:buSzPct val="61111"/>
-              <a:buFont typeface="Arial"/>
               <a:buNone/>
             </a:pPr>
             <a:r>
-              <a:rPr lang="hu"/>
-              <a:t>F1: 0.41220657276995304</a:t>
+              <a:rPr lang="hu" sz="1108"/>
+              <a:t>F1: 0.4122</a:t>
             </a:r>
-            <a:endParaRPr/>
+            <a:endParaRPr sz="1108"/>
           </a:p>
           <a:p>
             <a:pPr indent="0" lvl="0" marL="0" rtl="0" algn="l">
@@ -6527,20 +6302,20 @@
                 <a:spcPts val="0"/>
               </a:spcBef>
               <a:spcAft>
-                <a:spcPts val="1200"/>
+                <a:spcPts val="739"/>
               </a:spcAft>
               <a:buNone/>
             </a:pPr>
             <a:r>
               <a:t/>
             </a:r>
-            <a:endParaRPr/>
+            <a:endParaRPr sz="1108"/>
           </a:p>
         </p:txBody>
       </p:sp>
       <p:pic>
         <p:nvPicPr>
-          <p:cNvPr id="69" name="Google Shape;69;p15" title="pr-cv-output.png"/>
+          <p:cNvPr id="64" name="Google Shape;64;p14" title="pr-cv-output.png"/>
           <p:cNvPicPr preferRelativeResize="0"/>
           <p:nvPr/>
         </p:nvPicPr>
@@ -6554,8 +6329,8 @@
         </p:blipFill>
         <p:spPr>
           <a:xfrm>
-            <a:off x="4517700" y="1319750"/>
-            <a:ext cx="4314590" cy="3081850"/>
+            <a:off x="5851267" y="3135138"/>
+            <a:ext cx="2655756" cy="1896969"/>
           </a:xfrm>
           <a:prstGeom prst="rect">
             <a:avLst/>
@@ -6575,6 +6350,285 @@
 </file>
 
 <file path=ppt/theme/theme1.xml><?xml version="1.0" encoding="utf-8"?>
+<a:theme xmlns:a="http://schemas.openxmlformats.org/drawingml/2006/main" xmlns:r="http://schemas.openxmlformats.org/officeDocument/2006/relationships" name="Simple Light">
+  <a:themeElements>
+    <a:clrScheme name="Simple Light">
+      <a:dk1>
+        <a:srgbClr val="000000"/>
+      </a:dk1>
+      <a:lt1>
+        <a:srgbClr val="FFFFFF"/>
+      </a:lt1>
+      <a:dk2>
+        <a:srgbClr val="595959"/>
+      </a:dk2>
+      <a:lt2>
+        <a:srgbClr val="EEEEEE"/>
+      </a:lt2>
+      <a:accent1>
+        <a:srgbClr val="4285F4"/>
+      </a:accent1>
+      <a:accent2>
+        <a:srgbClr val="212121"/>
+      </a:accent2>
+      <a:accent3>
+        <a:srgbClr val="78909C"/>
+      </a:accent3>
+      <a:accent4>
+        <a:srgbClr val="FFAB40"/>
+      </a:accent4>
+      <a:accent5>
+        <a:srgbClr val="0097A7"/>
+      </a:accent5>
+      <a:accent6>
+        <a:srgbClr val="EEFF41"/>
+      </a:accent6>
+      <a:hlink>
+        <a:srgbClr val="0097A7"/>
+      </a:hlink>
+      <a:folHlink>
+        <a:srgbClr val="0097A7"/>
+      </a:folHlink>
+    </a:clrScheme>
+    <a:fontScheme name="Office">
+      <a:majorFont>
+        <a:latin typeface="Arial"/>
+        <a:ea typeface=""/>
+        <a:cs typeface=""/>
+        <a:font script="Jpan" typeface="ＭＳ Ｐゴシック"/>
+        <a:font script="Hang" typeface="맑은 고딕"/>
+        <a:font script="Hans" typeface="宋体"/>
+        <a:font script="Hant" typeface="新細明體"/>
+        <a:font script="Arab" typeface="Times New Roman"/>
+        <a:font script="Hebr" typeface="Times New Roman"/>
+        <a:font script="Thai" typeface="Angsana New"/>
+        <a:font script="Ethi" typeface="Nyala"/>
+        <a:font script="Beng" typeface="Vrinda"/>
+        <a:font script="Gujr" typeface="Shruti"/>
+        <a:font script="Khmr" typeface="MoolBoran"/>
+        <a:font script="Knda" typeface="Tunga"/>
+        <a:font script="Guru" typeface="Raavi"/>
+        <a:font script="Cans" typeface="Euphemia"/>
+        <a:font script="Cher" typeface="Plantagenet Cherokee"/>
+        <a:font script="Yiii" typeface="Microsoft Yi Baiti"/>
+        <a:font script="Tibt" typeface="Microsoft Himalaya"/>
+        <a:font script="Thaa" typeface="MV Boli"/>
+        <a:font script="Deva" typeface="Mangal"/>
+        <a:font script="Telu" typeface="Gautami"/>
+        <a:font script="Taml" typeface="Latha"/>
+        <a:font script="Syrc" typeface="Estrangelo Edessa"/>
+        <a:font script="Orya" typeface="Kalinga"/>
+        <a:font script="Mlym" typeface="Kartika"/>
+        <a:font script="Laoo" typeface="DokChampa"/>
+        <a:font script="Sinh" typeface="Iskoola Pota"/>
+        <a:font script="Mong" typeface="Mongolian Baiti"/>
+        <a:font script="Viet" typeface="Times New Roman"/>
+        <a:font script="Uigh" typeface="Microsoft Uighur"/>
+        <a:font script="Geor" typeface="Sylfaen"/>
+      </a:majorFont>
+      <a:minorFont>
+        <a:latin typeface="Arial"/>
+        <a:ea typeface=""/>
+        <a:cs typeface=""/>
+        <a:font script="Jpan" typeface="ＭＳ Ｐゴシック"/>
+        <a:font script="Hang" typeface="맑은 고딕"/>
+        <a:font script="Hans" typeface="宋体"/>
+        <a:font script="Hant" typeface="新細明體"/>
+        <a:font script="Arab" typeface="Arial"/>
+        <a:font script="Hebr" typeface="Arial"/>
+        <a:font script="Thai" typeface="Cordia New"/>
+        <a:font script="Ethi" typeface="Nyala"/>
+        <a:font script="Beng" typeface="Vrinda"/>
+        <a:font script="Gujr" typeface="Shruti"/>
+        <a:font script="Khmr" typeface="DaunPenh"/>
+        <a:font script="Knda" typeface="Tunga"/>
+        <a:font script="Guru" typeface="Raavi"/>
+        <a:font script="Cans" typeface="Euphemia"/>
+        <a:font script="Cher" typeface="Plantagenet Cherokee"/>
+        <a:font script="Yiii" typeface="Microsoft Yi Baiti"/>
+        <a:font script="Tibt" typeface="Microsoft Himalaya"/>
+        <a:font script="Thaa" typeface="MV Boli"/>
+        <a:font script="Deva" typeface="Mangal"/>
+        <a:font script="Telu" typeface="Gautami"/>
+        <a:font script="Taml" typeface="Latha"/>
+        <a:font script="Syrc" typeface="Estrangelo Edessa"/>
+        <a:font script="Orya" typeface="Kalinga"/>
+        <a:font script="Mlym" typeface="Kartika"/>
+        <a:font script="Laoo" typeface="DokChampa"/>
+        <a:font script="Sinh" typeface="Iskoola Pota"/>
+        <a:font script="Mong" typeface="Mongolian Baiti"/>
+        <a:font script="Viet" typeface="Arial"/>
+        <a:font script="Uigh" typeface="Microsoft Uighur"/>
+        <a:font script="Geor" typeface="Sylfaen"/>
+      </a:minorFont>
+    </a:fontScheme>
+    <a:fmtScheme name="Office">
+      <a:fillStyleLst>
+        <a:solidFill>
+          <a:schemeClr val="phClr"/>
+        </a:solidFill>
+        <a:gradFill rotWithShape="1">
+          <a:gsLst>
+            <a:gs pos="0">
+              <a:schemeClr val="phClr">
+                <a:tint val="50000"/>
+                <a:satMod val="300000"/>
+              </a:schemeClr>
+            </a:gs>
+            <a:gs pos="35000">
+              <a:schemeClr val="phClr">
+                <a:tint val="37000"/>
+                <a:satMod val="300000"/>
+              </a:schemeClr>
+            </a:gs>
+            <a:gs pos="100000">
+              <a:schemeClr val="phClr">
+                <a:tint val="15000"/>
+                <a:satMod val="350000"/>
+              </a:schemeClr>
+            </a:gs>
+          </a:gsLst>
+          <a:lin ang="16200000" scaled="1"/>
+        </a:gradFill>
+        <a:gradFill rotWithShape="1">
+          <a:gsLst>
+            <a:gs pos="0">
+              <a:schemeClr val="phClr">
+                <a:tint val="100000"/>
+                <a:shade val="100000"/>
+                <a:satMod val="130000"/>
+              </a:schemeClr>
+            </a:gs>
+            <a:gs pos="100000">
+              <a:schemeClr val="phClr">
+                <a:tint val="50000"/>
+                <a:shade val="100000"/>
+                <a:satMod val="350000"/>
+              </a:schemeClr>
+            </a:gs>
+          </a:gsLst>
+          <a:lin ang="16200000" scaled="0"/>
+        </a:gradFill>
+      </a:fillStyleLst>
+      <a:lnStyleLst>
+        <a:ln w="9525" cap="flat" cmpd="sng" algn="ctr">
+          <a:solidFill>
+            <a:schemeClr val="phClr">
+              <a:shade val="95000"/>
+              <a:satMod val="105000"/>
+            </a:schemeClr>
+          </a:solidFill>
+          <a:prstDash val="solid"/>
+        </a:ln>
+        <a:ln w="25400" cap="flat" cmpd="sng" algn="ctr">
+          <a:solidFill>
+            <a:schemeClr val="phClr"/>
+          </a:solidFill>
+          <a:prstDash val="solid"/>
+        </a:ln>
+        <a:ln w="38100" cap="flat" cmpd="sng" algn="ctr">
+          <a:solidFill>
+            <a:schemeClr val="phClr"/>
+          </a:solidFill>
+          <a:prstDash val="solid"/>
+        </a:ln>
+      </a:lnStyleLst>
+      <a:effectStyleLst>
+        <a:effectStyle>
+          <a:effectLst>
+            <a:outerShdw blurRad="40000" dist="20000" dir="5400000" rotWithShape="0">
+              <a:srgbClr val="000000">
+                <a:alpha val="38000"/>
+              </a:srgbClr>
+            </a:outerShdw>
+          </a:effectLst>
+        </a:effectStyle>
+        <a:effectStyle>
+          <a:effectLst>
+            <a:outerShdw blurRad="40000" dist="23000" dir="5400000" rotWithShape="0">
+              <a:srgbClr val="000000">
+                <a:alpha val="35000"/>
+              </a:srgbClr>
+            </a:outerShdw>
+          </a:effectLst>
+        </a:effectStyle>
+        <a:effectStyle>
+          <a:effectLst>
+            <a:outerShdw blurRad="40000" dist="23000" dir="5400000" rotWithShape="0">
+              <a:srgbClr val="000000">
+                <a:alpha val="35000"/>
+              </a:srgbClr>
+            </a:outerShdw>
+          </a:effectLst>
+          <a:scene3d>
+            <a:camera prst="orthographicFront">
+              <a:rot lat="0" lon="0" rev="0"/>
+            </a:camera>
+            <a:lightRig rig="threePt" dir="t">
+              <a:rot lat="0" lon="0" rev="1200000"/>
+            </a:lightRig>
+          </a:scene3d>
+          <a:sp3d>
+            <a:bevelT w="63500" h="25400"/>
+          </a:sp3d>
+        </a:effectStyle>
+      </a:effectStyleLst>
+      <a:bgFillStyleLst>
+        <a:solidFill>
+          <a:schemeClr val="phClr"/>
+        </a:solidFill>
+        <a:gradFill rotWithShape="1">
+          <a:gsLst>
+            <a:gs pos="0">
+              <a:schemeClr val="phClr">
+                <a:tint val="40000"/>
+                <a:satMod val="350000"/>
+              </a:schemeClr>
+            </a:gs>
+            <a:gs pos="40000">
+              <a:schemeClr val="phClr">
+                <a:tint val="45000"/>
+                <a:shade val="99000"/>
+                <a:satMod val="350000"/>
+              </a:schemeClr>
+            </a:gs>
+            <a:gs pos="100000">
+              <a:schemeClr val="phClr">
+                <a:shade val="20000"/>
+                <a:satMod val="255000"/>
+              </a:schemeClr>
+            </a:gs>
+          </a:gsLst>
+          <a:path path="circle">
+            <a:fillToRect l="50000" t="-80000" r="50000" b="180000"/>
+          </a:path>
+        </a:gradFill>
+        <a:gradFill rotWithShape="1">
+          <a:gsLst>
+            <a:gs pos="0">
+              <a:schemeClr val="phClr">
+                <a:tint val="80000"/>
+                <a:satMod val="300000"/>
+              </a:schemeClr>
+            </a:gs>
+            <a:gs pos="100000">
+              <a:schemeClr val="phClr">
+                <a:shade val="30000"/>
+                <a:satMod val="200000"/>
+              </a:schemeClr>
+            </a:gs>
+          </a:gsLst>
+          <a:path path="circle">
+            <a:fillToRect l="50000" t="50000" r="50000" b="50000"/>
+          </a:path>
+        </a:gradFill>
+      </a:bgFillStyleLst>
+    </a:fmtScheme>
+  </a:themeElements>
+</a:theme>
+</file>
+
+<file path=ppt/theme/theme2.xml><?xml version="1.0" encoding="utf-8"?>
 <a:theme xmlns:a="http://schemas.openxmlformats.org/drawingml/2006/main" xmlns:r="http://schemas.openxmlformats.org/officeDocument/2006/relationships">
   <a:themeElements>
     <a:clrScheme name="Default">
@@ -6851,283 +6905,4 @@
     </a:fmtScheme>
   </a:themeElements>
 </a:theme>
-</file>
-
-<file path=ppt/theme/theme2.xml><?xml version="1.0" encoding="utf-8"?>
-<a:theme xmlns:a="http://schemas.openxmlformats.org/drawingml/2006/main" xmlns:r="http://schemas.openxmlformats.org/officeDocument/2006/relationships" name="Simple Light">
-  <a:themeElements>
-    <a:clrScheme name="Simple Light">
-      <a:dk1>
-        <a:srgbClr val="000000"/>
-      </a:dk1>
-      <a:lt1>
-        <a:srgbClr val="FFFFFF"/>
-      </a:lt1>
-      <a:dk2>
-        <a:srgbClr val="595959"/>
-      </a:dk2>
-      <a:lt2>
-        <a:srgbClr val="EEEEEE"/>
-      </a:lt2>
-      <a:accent1>
-        <a:srgbClr val="4285F4"/>
-      </a:accent1>
-      <a:accent2>
-        <a:srgbClr val="212121"/>
-      </a:accent2>
-      <a:accent3>
-        <a:srgbClr val="78909C"/>
-      </a:accent3>
-      <a:accent4>
-        <a:srgbClr val="FFAB40"/>
-      </a:accent4>
-      <a:accent5>
-        <a:srgbClr val="0097A7"/>
-      </a:accent5>
-      <a:accent6>
-        <a:srgbClr val="EEFF41"/>
-      </a:accent6>
-      <a:hlink>
-        <a:srgbClr val="0097A7"/>
-      </a:hlink>
-      <a:folHlink>
-        <a:srgbClr val="0097A7"/>
-      </a:folHlink>
-    </a:clrScheme>
-    <a:fontScheme name="Office">
-      <a:majorFont>
-        <a:latin typeface="Arial"/>
-        <a:ea typeface=""/>
-        <a:cs typeface=""/>
-        <a:font script="Jpan" typeface="ＭＳ Ｐゴシック"/>
-        <a:font script="Hang" typeface="맑은 고딕"/>
-        <a:font script="Hans" typeface="宋体"/>
-        <a:font script="Hant" typeface="新細明體"/>
-        <a:font script="Arab" typeface="Times New Roman"/>
-        <a:font script="Hebr" typeface="Times New Roman"/>
-        <a:font script="Thai" typeface="Angsana New"/>
-        <a:font script="Ethi" typeface="Nyala"/>
-        <a:font script="Beng" typeface="Vrinda"/>
-        <a:font script="Gujr" typeface="Shruti"/>
-        <a:font script="Khmr" typeface="MoolBoran"/>
-        <a:font script="Knda" typeface="Tunga"/>
-        <a:font script="Guru" typeface="Raavi"/>
-        <a:font script="Cans" typeface="Euphemia"/>
-        <a:font script="Cher" typeface="Plantagenet Cherokee"/>
-        <a:font script="Yiii" typeface="Microsoft Yi Baiti"/>
-        <a:font script="Tibt" typeface="Microsoft Himalaya"/>
-        <a:font script="Thaa" typeface="MV Boli"/>
-        <a:font script="Deva" typeface="Mangal"/>
-        <a:font script="Telu" typeface="Gautami"/>
-        <a:font script="Taml" typeface="Latha"/>
-        <a:font script="Syrc" typeface="Estrangelo Edessa"/>
-        <a:font script="Orya" typeface="Kalinga"/>
-        <a:font script="Mlym" typeface="Kartika"/>
-        <a:font script="Laoo" typeface="DokChampa"/>
-        <a:font script="Sinh" typeface="Iskoola Pota"/>
-        <a:font script="Mong" typeface="Mongolian Baiti"/>
-        <a:font script="Viet" typeface="Times New Roman"/>
-        <a:font script="Uigh" typeface="Microsoft Uighur"/>
-        <a:font script="Geor" typeface="Sylfaen"/>
-      </a:majorFont>
-      <a:minorFont>
-        <a:latin typeface="Arial"/>
-        <a:ea typeface=""/>
-        <a:cs typeface=""/>
-        <a:font script="Jpan" typeface="ＭＳ Ｐゴシック"/>
-        <a:font script="Hang" typeface="맑은 고딕"/>
-        <a:font script="Hans" typeface="宋体"/>
-        <a:font script="Hant" typeface="新細明體"/>
-        <a:font script="Arab" typeface="Arial"/>
-        <a:font script="Hebr" typeface="Arial"/>
-        <a:font script="Thai" typeface="Cordia New"/>
-        <a:font script="Ethi" typeface="Nyala"/>
-        <a:font script="Beng" typeface="Vrinda"/>
-        <a:font script="Gujr" typeface="Shruti"/>
-        <a:font script="Khmr" typeface="DaunPenh"/>
-        <a:font script="Knda" typeface="Tunga"/>
-        <a:font script="Guru" typeface="Raavi"/>
-        <a:font script="Cans" typeface="Euphemia"/>
-        <a:font script="Cher" typeface="Plantagenet Cherokee"/>
-        <a:font script="Yiii" typeface="Microsoft Yi Baiti"/>
-        <a:font script="Tibt" typeface="Microsoft Himalaya"/>
-        <a:font script="Thaa" typeface="MV Boli"/>
-        <a:font script="Deva" typeface="Mangal"/>
-        <a:font script="Telu" typeface="Gautami"/>
-        <a:font script="Taml" typeface="Latha"/>
-        <a:font script="Syrc" typeface="Estrangelo Edessa"/>
-        <a:font script="Orya" typeface="Kalinga"/>
-        <a:font script="Mlym" typeface="Kartika"/>
-        <a:font script="Laoo" typeface="DokChampa"/>
-        <a:font script="Sinh" typeface="Iskoola Pota"/>
-        <a:font script="Mong" typeface="Mongolian Baiti"/>
-        <a:font script="Viet" typeface="Arial"/>
-        <a:font script="Uigh" typeface="Microsoft Uighur"/>
-        <a:font script="Geor" typeface="Sylfaen"/>
-      </a:minorFont>
-    </a:fontScheme>
-    <a:fmtScheme name="Office">
-      <a:fillStyleLst>
-        <a:solidFill>
-          <a:schemeClr val="phClr"/>
-        </a:solidFill>
-        <a:gradFill rotWithShape="1">
-          <a:gsLst>
-            <a:gs pos="0">
-              <a:schemeClr val="phClr">
-                <a:tint val="50000"/>
-                <a:satMod val="300000"/>
-              </a:schemeClr>
-            </a:gs>
-            <a:gs pos="35000">
-              <a:schemeClr val="phClr">
-                <a:tint val="37000"/>
-                <a:satMod val="300000"/>
-              </a:schemeClr>
-            </a:gs>
-            <a:gs pos="100000">
-              <a:schemeClr val="phClr">
-                <a:tint val="15000"/>
-                <a:satMod val="350000"/>
-              </a:schemeClr>
-            </a:gs>
-          </a:gsLst>
-          <a:lin ang="16200000" scaled="1"/>
-        </a:gradFill>
-        <a:gradFill rotWithShape="1">
-          <a:gsLst>
-            <a:gs pos="0">
-              <a:schemeClr val="phClr">
-                <a:tint val="100000"/>
-                <a:shade val="100000"/>
-                <a:satMod val="130000"/>
-              </a:schemeClr>
-            </a:gs>
-            <a:gs pos="100000">
-              <a:schemeClr val="phClr">
-                <a:tint val="50000"/>
-                <a:shade val="100000"/>
-                <a:satMod val="350000"/>
-              </a:schemeClr>
-            </a:gs>
-          </a:gsLst>
-          <a:lin ang="16200000" scaled="0"/>
-        </a:gradFill>
-      </a:fillStyleLst>
-      <a:lnStyleLst>
-        <a:ln w="9525" cap="flat" cmpd="sng" algn="ctr">
-          <a:solidFill>
-            <a:schemeClr val="phClr">
-              <a:shade val="95000"/>
-              <a:satMod val="105000"/>
-            </a:schemeClr>
-          </a:solidFill>
-          <a:prstDash val="solid"/>
-        </a:ln>
-        <a:ln w="25400" cap="flat" cmpd="sng" algn="ctr">
-          <a:solidFill>
-            <a:schemeClr val="phClr"/>
-          </a:solidFill>
-          <a:prstDash val="solid"/>
-        </a:ln>
-        <a:ln w="38100" cap="flat" cmpd="sng" algn="ctr">
-          <a:solidFill>
-            <a:schemeClr val="phClr"/>
-          </a:solidFill>
-          <a:prstDash val="solid"/>
-        </a:ln>
-      </a:lnStyleLst>
-      <a:effectStyleLst>
-        <a:effectStyle>
-          <a:effectLst>
-            <a:outerShdw blurRad="40000" dist="20000" dir="5400000" rotWithShape="0">
-              <a:srgbClr val="000000">
-                <a:alpha val="38000"/>
-              </a:srgbClr>
-            </a:outerShdw>
-          </a:effectLst>
-        </a:effectStyle>
-        <a:effectStyle>
-          <a:effectLst>
-            <a:outerShdw blurRad="40000" dist="23000" dir="5400000" rotWithShape="0">
-              <a:srgbClr val="000000">
-                <a:alpha val="35000"/>
-              </a:srgbClr>
-            </a:outerShdw>
-          </a:effectLst>
-        </a:effectStyle>
-        <a:effectStyle>
-          <a:effectLst>
-            <a:outerShdw blurRad="40000" dist="23000" dir="5400000" rotWithShape="0">
-              <a:srgbClr val="000000">
-                <a:alpha val="35000"/>
-              </a:srgbClr>
-            </a:outerShdw>
-          </a:effectLst>
-          <a:scene3d>
-            <a:camera prst="orthographicFront">
-              <a:rot lat="0" lon="0" rev="0"/>
-            </a:camera>
-            <a:lightRig rig="threePt" dir="t">
-              <a:rot lat="0" lon="0" rev="1200000"/>
-            </a:lightRig>
-          </a:scene3d>
-          <a:sp3d>
-            <a:bevelT w="63500" h="25400"/>
-          </a:sp3d>
-        </a:effectStyle>
-      </a:effectStyleLst>
-      <a:bgFillStyleLst>
-        <a:solidFill>
-          <a:schemeClr val="phClr"/>
-        </a:solidFill>
-        <a:gradFill rotWithShape="1">
-          <a:gsLst>
-            <a:gs pos="0">
-              <a:schemeClr val="phClr">
-                <a:tint val="40000"/>
-                <a:satMod val="350000"/>
-              </a:schemeClr>
-            </a:gs>
-            <a:gs pos="40000">
-              <a:schemeClr val="phClr">
-                <a:tint val="45000"/>
-                <a:shade val="99000"/>
-                <a:satMod val="350000"/>
-              </a:schemeClr>
-            </a:gs>
-            <a:gs pos="100000">
-              <a:schemeClr val="phClr">
-                <a:shade val="20000"/>
-                <a:satMod val="255000"/>
-              </a:schemeClr>
-            </a:gs>
-          </a:gsLst>
-          <a:path path="circle">
-            <a:fillToRect l="50000" t="-80000" r="50000" b="180000"/>
-          </a:path>
-        </a:gradFill>
-        <a:gradFill rotWithShape="1">
-          <a:gsLst>
-            <a:gs pos="0">
-              <a:schemeClr val="phClr">
-                <a:tint val="80000"/>
-                <a:satMod val="300000"/>
-              </a:schemeClr>
-            </a:gs>
-            <a:gs pos="100000">
-              <a:schemeClr val="phClr">
-                <a:shade val="30000"/>
-                <a:satMod val="200000"/>
-              </a:schemeClr>
-            </a:gs>
-          </a:gsLst>
-          <a:path path="circle">
-            <a:fillToRect l="50000" t="50000" r="50000" b="50000"/>
-          </a:path>
-        </a:gradFill>
-      </a:bgFillStyleLst>
-    </a:fmtScheme>
-  </a:themeElements>
-</a:theme>
 </file>